--- a/submission/03_运行与评测包/补充案例_20260903/02_bazn2si2o7/figures/figstudio/bzso_roadmap/deliverables/roadmap_bazn2si2o7_editable.pptx
+++ b/submission/03_运行与评测包/补充案例_20260903/02_bazn2si2o7/figures/figstudio/bzso_roadmap/deliverables/roadmap_bazn2si2o7_editable.pptx
@@ -7,7 +7,7 @@
   <p:sldIdLst>
     <p:sldId id="256" r:id="rId7"/>
   </p:sldIdLst>
-  <p:sldSz cx="12191999" cy="7143749" type="screen4x3"/>
+  <p:sldSz cx="12191999" cy="6334124" type="screen4x3"/>
   <p:notesSz cx="6858000" cy="9144000"/>
   <p:defaultTextStyle>
     <a:defPPr>
@@ -502,7 +502,7 @@
           <a:lstStyle/>
           <a:p>
             <a:r>
-              <a:t>BaZn2Si2O7 本文的行文路线图（第五轮 F02 → super_img2ppt 重建；3+3 两行，印刷可读优先）</a:t>
+              <a:t>BaZn2Si2O7 本文的行文路线图（第六轮：印刷字号 + 内容定尺寸；3+3 两行） [paper=bzso] [print_width_pt=435.2]</a:t>
             </a:r>
           </a:p>
         </p:txBody>
@@ -3524,12 +3524,12 @@
         </p:nvSpPr>
         <p:spPr>
           <a:xfrm>
-            <a:off x="238124" y="317499"/>
-            <a:ext cx="11715749" cy="3032124"/>
+            <a:off x="206374" y="206374"/>
+            <a:ext cx="11779249" cy="2651124"/>
           </a:xfrm>
           <a:prstGeom prst="roundRect">
             <a:avLst>
-              <a:gd name="adj" fmla="val 3664"/>
+              <a:gd name="adj" fmla="val 4191"/>
             </a:avLst>
           </a:prstGeom>
           <a:solidFill>
@@ -3572,8 +3572,8 @@
         </p:nvSpPr>
         <p:spPr>
           <a:xfrm>
-            <a:off x="380999" y="396874"/>
-            <a:ext cx="1063624" cy="357187"/>
+            <a:off x="349249" y="285749"/>
+            <a:ext cx="1285874" cy="444499"/>
           </a:xfrm>
           <a:prstGeom prst="rect">
             <a:avLst/>
@@ -3589,7 +3589,7 @@
           <a:p>
             <a:pPr algn="l" fontAlgn="base">
               <a:lnSpc>
-                <a:spcPts val="2359"/>
+                <a:spcPts val="3015"/>
               </a:lnSpc>
               <a:spcBef>
                 <a:spcPts val="0"/>
@@ -3597,7 +3597,7 @@
               <a:spcAft>
                 <a:spcPts val="0"/>
               </a:spcAft>
-              <a:defRPr sz="1624" b="1" i="0" lang="zh-CN" dirty="0">
+              <a:defRPr sz="2062" b="1" i="0" lang="zh-CN" dirty="0">
                 <a:solidFill>
                   <a:srgbClr val="2B3E57"/>
                 </a:solidFill>
@@ -3607,7 +3607,7 @@
               </a:defRPr>
             </a:pPr>
             <a:r>
-              <a:rPr sz="1624" b="1" i="0" lang="zh-CN" dirty="0">
+              <a:rPr sz="2062" b="1" i="0" lang="zh-CN" dirty="0">
                 <a:solidFill>
                   <a:srgbClr val="2B3E57"/>
                 </a:solidFill>
@@ -3628,12 +3628,12 @@
         </p:nvSpPr>
         <p:spPr>
           <a:xfrm>
-            <a:off x="238124" y="3730624"/>
-            <a:ext cx="11715749" cy="3095624"/>
+            <a:off x="206374" y="3476624"/>
+            <a:ext cx="11779249" cy="2651124"/>
           </a:xfrm>
           <a:prstGeom prst="roundRect">
             <a:avLst>
-              <a:gd name="adj" fmla="val 3589"/>
+              <a:gd name="adj" fmla="val 4191"/>
             </a:avLst>
           </a:prstGeom>
           <a:solidFill>
@@ -3676,8 +3676,8 @@
         </p:nvSpPr>
         <p:spPr>
           <a:xfrm>
-            <a:off x="380999" y="3809999"/>
-            <a:ext cx="1063624" cy="357187"/>
+            <a:off x="349249" y="3555999"/>
+            <a:ext cx="1285874" cy="444499"/>
           </a:xfrm>
           <a:prstGeom prst="rect">
             <a:avLst/>
@@ -3693,7 +3693,7 @@
           <a:p>
             <a:pPr algn="l" fontAlgn="base">
               <a:lnSpc>
-                <a:spcPts val="2359"/>
+                <a:spcPts val="3015"/>
               </a:lnSpc>
               <a:spcBef>
                 <a:spcPts val="0"/>
@@ -3701,7 +3701,7 @@
               <a:spcAft>
                 <a:spcPts val="0"/>
               </a:spcAft>
-              <a:defRPr sz="1624" b="1" i="0" lang="zh-CN" dirty="0">
+              <a:defRPr sz="2062" b="1" i="0" lang="zh-CN" dirty="0">
                 <a:solidFill>
                   <a:srgbClr val="0F4F58"/>
                 </a:solidFill>
@@ -3711,7 +3711,7 @@
               </a:defRPr>
             </a:pPr>
             <a:r>
-              <a:rPr sz="1624" b="1" i="0" lang="zh-CN" dirty="0">
+              <a:rPr sz="2062" b="1" i="0" lang="zh-CN" dirty="0">
                 <a:solidFill>
                   <a:srgbClr val="0F4F58"/>
                 </a:solidFill>
@@ -3732,12 +3732,12 @@
         </p:nvSpPr>
         <p:spPr>
           <a:xfrm>
-            <a:off x="555624" y="888999"/>
-            <a:ext cx="3333749" cy="2206624"/>
+            <a:off x="333374" y="809624"/>
+            <a:ext cx="3492499" cy="1904999"/>
           </a:xfrm>
           <a:prstGeom prst="roundRect">
             <a:avLst>
-              <a:gd name="adj" fmla="val 3237"/>
+              <a:gd name="adj" fmla="val 3750"/>
             </a:avLst>
           </a:prstGeom>
           <a:solidFill>
@@ -3780,8 +3780,8 @@
         </p:nvSpPr>
         <p:spPr>
           <a:xfrm>
-            <a:off x="555624" y="888999"/>
-            <a:ext cx="79374" cy="2206624"/>
+            <a:off x="333374" y="809624"/>
+            <a:ext cx="79374" cy="1904999"/>
           </a:xfrm>
           <a:prstGeom prst="roundRect">
             <a:avLst>
@@ -3826,8 +3826,8 @@
         </p:nvSpPr>
         <p:spPr>
           <a:xfrm>
-            <a:off x="777874" y="1031874"/>
-            <a:ext cx="730249" cy="484187"/>
+            <a:off x="555624" y="952499"/>
+            <a:ext cx="873124" cy="563562"/>
           </a:xfrm>
           <a:prstGeom prst="rect">
             <a:avLst/>
@@ -3843,7 +3843,7 @@
           <a:p>
             <a:pPr algn="l" fontAlgn="base">
               <a:lnSpc>
-                <a:spcPts val="2624"/>
+                <a:spcPts val="3062"/>
               </a:lnSpc>
               <a:spcBef>
                 <a:spcPts val="0"/>
@@ -3851,7 +3851,7 @@
               <a:spcAft>
                 <a:spcPts val="0"/>
               </a:spcAft>
-              <a:defRPr sz="2249" b="1" i="0" lang="zh-CN" dirty="0">
+              <a:defRPr sz="2624" b="1" i="0" lang="zh-CN" dirty="0">
                 <a:solidFill>
                   <a:srgbClr val="2B3E57"/>
                 </a:solidFill>
@@ -3861,7 +3861,7 @@
               </a:defRPr>
             </a:pPr>
             <a:r>
-              <a:rPr sz="2249" b="1" i="0" lang="zh-CN" dirty="0">
+              <a:rPr sz="2624" b="1" i="0" lang="zh-CN" dirty="0">
                 <a:solidFill>
                   <a:srgbClr val="2B3E57"/>
                 </a:solidFill>
@@ -3882,13 +3882,13 @@
         </p:nvCxnSpPr>
         <p:spPr>
           <a:xfrm>
-            <a:off x="3238499" y="1055687"/>
-            <a:ext cx="293688" cy="190500"/>
+            <a:off x="3428999" y="1023937"/>
+            <a:ext cx="206375" cy="127000"/>
           </a:xfrm>
           <a:prstGeom prst="line">
             <a:avLst/>
           </a:prstGeom>
-          <a:ln w="19716">
+          <a:ln w="18216">
             <a:solidFill>
               <a:srgbClr val="111A24"/>
             </a:solidFill>
@@ -3918,13 +3918,13 @@
         </p:nvCxnSpPr>
         <p:spPr>
           <a:xfrm flipH="1">
-            <a:off x="3397249" y="1246187"/>
-            <a:ext cx="134938" cy="396875"/>
+            <a:off x="3540124" y="1150937"/>
+            <a:ext cx="95250" cy="277812"/>
           </a:xfrm>
           <a:prstGeom prst="line">
             <a:avLst/>
           </a:prstGeom>
-          <a:ln w="19716">
+          <a:ln w="18216">
             <a:solidFill>
               <a:srgbClr val="111A24"/>
             </a:solidFill>
@@ -3954,13 +3954,13 @@
         </p:nvCxnSpPr>
         <p:spPr>
           <a:xfrm flipH="1">
-            <a:off x="3079749" y="1643062"/>
-            <a:ext cx="317500" cy="0"/>
+            <a:off x="3317874" y="1428749"/>
+            <a:ext cx="222250" cy="0"/>
           </a:xfrm>
           <a:prstGeom prst="line">
             <a:avLst/>
           </a:prstGeom>
-          <a:ln w="19716">
+          <a:ln w="18216">
             <a:solidFill>
               <a:srgbClr val="111A24"/>
             </a:solidFill>
@@ -3990,13 +3990,13 @@
         </p:nvCxnSpPr>
         <p:spPr>
           <a:xfrm flipH="1" flipV="1">
-            <a:off x="2944812" y="1246187"/>
-            <a:ext cx="134937" cy="396875"/>
+            <a:off x="3222624" y="1150937"/>
+            <a:ext cx="95250" cy="277812"/>
           </a:xfrm>
           <a:prstGeom prst="line">
             <a:avLst/>
           </a:prstGeom>
-          <a:ln w="19716">
+          <a:ln w="18216">
             <a:solidFill>
               <a:srgbClr val="111A24"/>
             </a:solidFill>
@@ -4026,13 +4026,13 @@
         </p:nvCxnSpPr>
         <p:spPr>
           <a:xfrm flipV="1">
-            <a:off x="2944812" y="1055687"/>
-            <a:ext cx="293687" cy="190500"/>
+            <a:off x="3222624" y="1023937"/>
+            <a:ext cx="206375" cy="127000"/>
           </a:xfrm>
           <a:prstGeom prst="line">
             <a:avLst/>
           </a:prstGeom>
-          <a:ln w="19716">
+          <a:ln w="18216">
             <a:solidFill>
               <a:srgbClr val="111A24"/>
             </a:solidFill>
@@ -4062,13 +4062,13 @@
         </p:nvCxnSpPr>
         <p:spPr>
           <a:xfrm>
-            <a:off x="3238499" y="1055687"/>
-            <a:ext cx="0" cy="587375"/>
+            <a:off x="3428999" y="1023937"/>
+            <a:ext cx="0" cy="404812"/>
           </a:xfrm>
           <a:prstGeom prst="line">
             <a:avLst/>
           </a:prstGeom>
-          <a:ln w="19716">
+          <a:ln w="18216">
             <a:solidFill>
               <a:srgbClr val="111A24"/>
             </a:solidFill>
@@ -4098,13 +4098,13 @@
         </p:nvCxnSpPr>
         <p:spPr>
           <a:xfrm>
-            <a:off x="2944812" y="1246187"/>
-            <a:ext cx="587375" cy="0"/>
+            <a:off x="3222624" y="1150937"/>
+            <a:ext cx="412750" cy="0"/>
           </a:xfrm>
           <a:prstGeom prst="line">
             <a:avLst/>
           </a:prstGeom>
-          <a:ln w="19716">
+          <a:ln w="18216">
             <a:solidFill>
               <a:srgbClr val="111A24"/>
             </a:solidFill>
@@ -4134,8 +4134,8 @@
         </p:nvSpPr>
         <p:spPr>
           <a:xfrm>
-            <a:off x="777874" y="1809749"/>
-            <a:ext cx="2968624" cy="341312"/>
+            <a:off x="555624" y="1579562"/>
+            <a:ext cx="3127374" cy="388937"/>
           </a:xfrm>
           <a:prstGeom prst="rect">
             <a:avLst/>
@@ -4151,7 +4151,7 @@
           <a:p>
             <a:pPr algn="ctr" fontAlgn="base">
               <a:lnSpc>
-                <a:spcPts val="2468"/>
+                <a:spcPts val="2812"/>
               </a:lnSpc>
               <a:spcBef>
                 <a:spcPts val="0"/>
@@ -4159,7 +4159,7 @@
               <a:spcAft>
                 <a:spcPts val="0"/>
               </a:spcAft>
-              <a:defRPr sz="1687" b="1" i="0" lang="zh-CN" dirty="0">
+              <a:defRPr sz="1937" b="1" i="0" lang="zh-CN" dirty="0">
                 <a:solidFill>
                   <a:srgbClr val="2B3E57"/>
                 </a:solidFill>
@@ -4169,7 +4169,7 @@
               </a:defRPr>
             </a:pPr>
             <a:r>
-              <a:rPr sz="1687" b="1" i="0" lang="zh-CN" dirty="0">
+              <a:rPr sz="1937" b="1" i="0" lang="zh-CN" dirty="0">
                 <a:solidFill>
                   <a:srgbClr val="2B3E57"/>
                 </a:solidFill>
@@ -4190,8 +4190,8 @@
         </p:nvCxnSpPr>
         <p:spPr>
           <a:xfrm>
-            <a:off x="825499" y="2262187"/>
-            <a:ext cx="2873375" cy="0"/>
+            <a:off x="603249" y="2063749"/>
+            <a:ext cx="3032125" cy="0"/>
           </a:xfrm>
           <a:prstGeom prst="line">
             <a:avLst/>
@@ -4226,12 +4226,12 @@
         </p:nvSpPr>
         <p:spPr>
           <a:xfrm>
-            <a:off x="777874" y="2666999"/>
-            <a:ext cx="2968624" cy="285749"/>
+            <a:off x="555624" y="2174874"/>
+            <a:ext cx="3127374" cy="396874"/>
           </a:xfrm>
           <a:prstGeom prst="roundRect">
             <a:avLst>
-              <a:gd name="adj" fmla="val 16666"/>
+              <a:gd name="adj" fmla="val 12000"/>
             </a:avLst>
           </a:prstGeom>
           <a:solidFill>
@@ -4274,8 +4274,8 @@
         </p:nvSpPr>
         <p:spPr>
           <a:xfrm>
-            <a:off x="833437" y="2698749"/>
-            <a:ext cx="2857499" cy="222249"/>
+            <a:off x="611187" y="2206624"/>
+            <a:ext cx="3016249" cy="333374"/>
           </a:xfrm>
           <a:prstGeom prst="rect">
             <a:avLst/>
@@ -4291,7 +4291,7 @@
           <a:p>
             <a:pPr algn="ctr" fontAlgn="base">
               <a:lnSpc>
-                <a:spcPts val="1718"/>
+                <a:spcPts val="2546"/>
               </a:lnSpc>
               <a:spcBef>
                 <a:spcPts val="0"/>
@@ -4299,7 +4299,7 @@
               <a:spcAft>
                 <a:spcPts val="0"/>
               </a:spcAft>
-              <a:defRPr sz="1185" b="1" i="0" lang="zh-CN" dirty="0">
+              <a:defRPr sz="1749" b="0" i="0" lang="zh-CN" dirty="0">
                 <a:solidFill>
                   <a:srgbClr val="27303A"/>
                 </a:solidFill>
@@ -4309,7 +4309,7 @@
               </a:defRPr>
             </a:pPr>
             <a:r>
-              <a:rPr sz="1185" b="1" i="0" lang="zh-CN" dirty="0">
+              <a:rPr sz="1749" b="0" i="0" lang="zh-CN" dirty="0">
                 <a:solidFill>
                   <a:srgbClr val="27303A"/>
                 </a:solidFill>
@@ -4330,12 +4330,12 @@
         </p:nvSpPr>
         <p:spPr>
           <a:xfrm>
-            <a:off x="4524374" y="888999"/>
-            <a:ext cx="3333749" cy="2206624"/>
+            <a:off x="4349749" y="809624"/>
+            <a:ext cx="3492499" cy="1904999"/>
           </a:xfrm>
           <a:prstGeom prst="roundRect">
             <a:avLst>
-              <a:gd name="adj" fmla="val 3237"/>
+              <a:gd name="adj" fmla="val 3750"/>
             </a:avLst>
           </a:prstGeom>
           <a:solidFill>
@@ -4378,8 +4378,8 @@
         </p:nvSpPr>
         <p:spPr>
           <a:xfrm>
-            <a:off x="4524374" y="888999"/>
-            <a:ext cx="79374" cy="2206624"/>
+            <a:off x="4349749" y="809624"/>
+            <a:ext cx="79374" cy="1904999"/>
           </a:xfrm>
           <a:prstGeom prst="roundRect">
             <a:avLst>
@@ -4424,8 +4424,8 @@
         </p:nvSpPr>
         <p:spPr>
           <a:xfrm>
-            <a:off x="4746624" y="1031874"/>
-            <a:ext cx="730249" cy="484187"/>
+            <a:off x="4571999" y="952499"/>
+            <a:ext cx="873124" cy="563562"/>
           </a:xfrm>
           <a:prstGeom prst="rect">
             <a:avLst/>
@@ -4441,7 +4441,7 @@
           <a:p>
             <a:pPr algn="l" fontAlgn="base">
               <a:lnSpc>
-                <a:spcPts val="2624"/>
+                <a:spcPts val="3062"/>
               </a:lnSpc>
               <a:spcBef>
                 <a:spcPts val="0"/>
@@ -4449,7 +4449,7 @@
               <a:spcAft>
                 <a:spcPts val="0"/>
               </a:spcAft>
-              <a:defRPr sz="2249" b="1" i="0" lang="zh-CN" dirty="0">
+              <a:defRPr sz="2624" b="1" i="0" lang="zh-CN" dirty="0">
                 <a:solidFill>
                   <a:srgbClr val="2B3E57"/>
                 </a:solidFill>
@@ -4459,7 +4459,7 @@
               </a:defRPr>
             </a:pPr>
             <a:r>
-              <a:rPr sz="2249" b="1" i="0" lang="zh-CN" dirty="0">
+              <a:rPr sz="2624" b="1" i="0" lang="zh-CN" dirty="0">
                 <a:solidFill>
                   <a:srgbClr val="2B3E57"/>
                 </a:solidFill>
@@ -4480,13 +4480,13 @@
         </p:nvCxnSpPr>
         <p:spPr>
           <a:xfrm>
-            <a:off x="7000874" y="1222374"/>
-            <a:ext cx="71438" cy="388938"/>
+            <a:off x="7302499" y="1135062"/>
+            <a:ext cx="47625" cy="269875"/>
           </a:xfrm>
           <a:prstGeom prst="line">
             <a:avLst/>
           </a:prstGeom>
-          <a:ln w="19716">
+          <a:ln w="18216">
             <a:solidFill>
               <a:srgbClr val="111A24"/>
             </a:solidFill>
@@ -4516,13 +4516,13 @@
         </p:nvCxnSpPr>
         <p:spPr>
           <a:xfrm>
-            <a:off x="7072312" y="1611312"/>
-            <a:ext cx="269875" cy="0"/>
+            <a:off x="7350124" y="1404937"/>
+            <a:ext cx="190500" cy="0"/>
           </a:xfrm>
           <a:prstGeom prst="line">
             <a:avLst/>
           </a:prstGeom>
-          <a:ln w="19716">
+          <a:ln w="18216">
             <a:solidFill>
               <a:srgbClr val="111A24"/>
             </a:solidFill>
@@ -4552,13 +4552,13 @@
         </p:nvCxnSpPr>
         <p:spPr>
           <a:xfrm flipV="1">
-            <a:off x="7342187" y="1222374"/>
-            <a:ext cx="71437" cy="388938"/>
+            <a:off x="7540624" y="1135062"/>
+            <a:ext cx="47625" cy="269875"/>
           </a:xfrm>
           <a:prstGeom prst="line">
             <a:avLst/>
           </a:prstGeom>
-          <a:ln w="19716">
+          <a:ln w="18216">
             <a:solidFill>
               <a:srgbClr val="111A24"/>
             </a:solidFill>
@@ -4588,13 +4588,13 @@
         </p:nvCxnSpPr>
         <p:spPr>
           <a:xfrm>
-            <a:off x="6961187" y="1222374"/>
-            <a:ext cx="492125" cy="0"/>
+            <a:off x="7270749" y="1135062"/>
+            <a:ext cx="349250" cy="0"/>
           </a:xfrm>
           <a:prstGeom prst="line">
             <a:avLst/>
           </a:prstGeom>
-          <a:ln w="19716">
+          <a:ln w="18216">
             <a:solidFill>
               <a:srgbClr val="111A24"/>
             </a:solidFill>
@@ -4624,8 +4624,8 @@
         </p:nvSpPr>
         <p:spPr>
           <a:xfrm>
-            <a:off x="4746624" y="1809749"/>
-            <a:ext cx="2968624" cy="341312"/>
+            <a:off x="4571999" y="1579562"/>
+            <a:ext cx="3127374" cy="388937"/>
           </a:xfrm>
           <a:prstGeom prst="rect">
             <a:avLst/>
@@ -4641,7 +4641,7 @@
           <a:p>
             <a:pPr algn="ctr" fontAlgn="base">
               <a:lnSpc>
-                <a:spcPts val="2468"/>
+                <a:spcPts val="2812"/>
               </a:lnSpc>
               <a:spcBef>
                 <a:spcPts val="0"/>
@@ -4649,7 +4649,7 @@
               <a:spcAft>
                 <a:spcPts val="0"/>
               </a:spcAft>
-              <a:defRPr sz="1687" b="1" i="0" lang="zh-CN" dirty="0">
+              <a:defRPr sz="1937" b="1" i="0" lang="zh-CN" dirty="0">
                 <a:solidFill>
                   <a:srgbClr val="2B3E57"/>
                 </a:solidFill>
@@ -4659,7 +4659,7 @@
               </a:defRPr>
             </a:pPr>
             <a:r>
-              <a:rPr sz="1687" b="1" i="0" lang="zh-CN" dirty="0">
+              <a:rPr sz="1937" b="1" i="0" lang="zh-CN" dirty="0">
                 <a:solidFill>
                   <a:srgbClr val="2B3E57"/>
                 </a:solidFill>
@@ -4680,8 +4680,8 @@
         </p:nvCxnSpPr>
         <p:spPr>
           <a:xfrm>
-            <a:off x="4794249" y="2262187"/>
-            <a:ext cx="2873375" cy="0"/>
+            <a:off x="4619624" y="2063749"/>
+            <a:ext cx="3032125" cy="0"/>
           </a:xfrm>
           <a:prstGeom prst="line">
             <a:avLst/>
@@ -4716,12 +4716,12 @@
         </p:nvSpPr>
         <p:spPr>
           <a:xfrm>
-            <a:off x="4746624" y="2666999"/>
-            <a:ext cx="2968624" cy="285749"/>
+            <a:off x="4571999" y="2174874"/>
+            <a:ext cx="3127374" cy="396874"/>
           </a:xfrm>
           <a:prstGeom prst="roundRect">
             <a:avLst>
-              <a:gd name="adj" fmla="val 16666"/>
+              <a:gd name="adj" fmla="val 12000"/>
             </a:avLst>
           </a:prstGeom>
           <a:solidFill>
@@ -4764,8 +4764,8 @@
         </p:nvSpPr>
         <p:spPr>
           <a:xfrm>
-            <a:off x="4802187" y="2698749"/>
-            <a:ext cx="2857499" cy="222249"/>
+            <a:off x="4627562" y="2206624"/>
+            <a:ext cx="3016249" cy="333374"/>
           </a:xfrm>
           <a:prstGeom prst="rect">
             <a:avLst/>
@@ -4781,7 +4781,7 @@
           <a:p>
             <a:pPr algn="ctr" fontAlgn="base">
               <a:lnSpc>
-                <a:spcPts val="1718"/>
+                <a:spcPts val="2546"/>
               </a:lnSpc>
               <a:spcBef>
                 <a:spcPts val="0"/>
@@ -4789,7 +4789,7 @@
               <a:spcAft>
                 <a:spcPts val="0"/>
               </a:spcAft>
-              <a:defRPr sz="1185" b="1" i="0" lang="zh-CN" dirty="0">
+              <a:defRPr sz="1749" b="0" i="0" lang="zh-CN" dirty="0">
                 <a:solidFill>
                   <a:srgbClr val="27303A"/>
                 </a:solidFill>
@@ -4799,7 +4799,7 @@
               </a:defRPr>
             </a:pPr>
             <a:r>
-              <a:rPr sz="1185" b="1" i="0" lang="zh-CN" dirty="0">
+              <a:rPr sz="1749" b="0" i="0" lang="zh-CN" dirty="0">
                 <a:solidFill>
                   <a:srgbClr val="27303A"/>
                 </a:solidFill>
@@ -4810,7 +4810,7 @@
               <a:t>固相</a:t>
             </a:r>
             <a:r>
-              <a:rPr sz="1185" b="1" i="0" lang="zh-CN" dirty="0">
+              <a:rPr sz="1749" b="0" i="0" lang="zh-CN" dirty="0">
                 <a:solidFill>
                   <a:srgbClr val="27303A"/>
                 </a:solidFill>
@@ -4821,7 +4821,7 @@
               <a:t> · </a:t>
             </a:r>
             <a:r>
-              <a:rPr sz="1185" b="1" i="0" lang="zh-CN" dirty="0">
+              <a:rPr sz="1749" b="0" i="0" lang="zh-CN" dirty="0">
                 <a:solidFill>
                   <a:srgbClr val="27303A"/>
                 </a:solidFill>
@@ -4832,7 +4832,7 @@
               <a:t>溶胶</a:t>
             </a:r>
             <a:r>
-              <a:rPr sz="1185" b="1" i="0" lang="zh-CN" dirty="0">
+              <a:rPr sz="1749" b="0" i="0" lang="zh-CN" dirty="0">
                 <a:solidFill>
                   <a:srgbClr val="27303A"/>
                 </a:solidFill>
@@ -4843,7 +4843,7 @@
               <a:t>—</a:t>
             </a:r>
             <a:r>
-              <a:rPr sz="1185" b="1" i="0" lang="zh-CN" dirty="0">
+              <a:rPr sz="1749" b="0" i="0" lang="zh-CN" dirty="0">
                 <a:solidFill>
                   <a:srgbClr val="27303A"/>
                 </a:solidFill>
@@ -4864,12 +4864,12 @@
         </p:nvSpPr>
         <p:spPr>
           <a:xfrm>
-            <a:off x="8493124" y="888999"/>
-            <a:ext cx="3333749" cy="2206624"/>
+            <a:off x="8366124" y="809624"/>
+            <a:ext cx="3492499" cy="1904999"/>
           </a:xfrm>
           <a:prstGeom prst="roundRect">
             <a:avLst>
-              <a:gd name="adj" fmla="val 3237"/>
+              <a:gd name="adj" fmla="val 3750"/>
             </a:avLst>
           </a:prstGeom>
           <a:solidFill>
@@ -4912,8 +4912,8 @@
         </p:nvSpPr>
         <p:spPr>
           <a:xfrm>
-            <a:off x="8493124" y="888999"/>
-            <a:ext cx="79374" cy="2206624"/>
+            <a:off x="8366124" y="809624"/>
+            <a:ext cx="79374" cy="1904999"/>
           </a:xfrm>
           <a:prstGeom prst="roundRect">
             <a:avLst>
@@ -4958,8 +4958,8 @@
         </p:nvSpPr>
         <p:spPr>
           <a:xfrm>
-            <a:off x="8715374" y="1031874"/>
-            <a:ext cx="730249" cy="484187"/>
+            <a:off x="8588374" y="952499"/>
+            <a:ext cx="873124" cy="563562"/>
           </a:xfrm>
           <a:prstGeom prst="rect">
             <a:avLst/>
@@ -4975,7 +4975,7 @@
           <a:p>
             <a:pPr algn="l" fontAlgn="base">
               <a:lnSpc>
-                <a:spcPts val="2624"/>
+                <a:spcPts val="3062"/>
               </a:lnSpc>
               <a:spcBef>
                 <a:spcPts val="0"/>
@@ -4983,7 +4983,7 @@
               <a:spcAft>
                 <a:spcPts val="0"/>
               </a:spcAft>
-              <a:defRPr sz="2249" b="1" i="0" lang="zh-CN" dirty="0">
+              <a:defRPr sz="2624" b="1" i="0" lang="zh-CN" dirty="0">
                 <a:solidFill>
                   <a:srgbClr val="2B3E57"/>
                 </a:solidFill>
@@ -4993,7 +4993,7 @@
               </a:defRPr>
             </a:pPr>
             <a:r>
-              <a:rPr sz="2249" b="1" i="0" lang="zh-CN" dirty="0">
+              <a:rPr sz="2624" b="1" i="0" lang="zh-CN" dirty="0">
                 <a:solidFill>
                   <a:srgbClr val="2B3E57"/>
                 </a:solidFill>
@@ -5014,13 +5014,13 @@
         </p:nvCxnSpPr>
         <p:spPr>
           <a:xfrm>
-            <a:off x="11175999" y="1103312"/>
-            <a:ext cx="277813" cy="127000"/>
+            <a:off x="11461749" y="1047749"/>
+            <a:ext cx="190500" cy="95250"/>
           </a:xfrm>
           <a:prstGeom prst="line">
             <a:avLst/>
           </a:prstGeom>
-          <a:ln w="19716">
+          <a:ln w="18216">
             <a:solidFill>
               <a:srgbClr val="111A24"/>
             </a:solidFill>
@@ -5050,13 +5050,13 @@
         </p:nvCxnSpPr>
         <p:spPr>
           <a:xfrm flipH="1">
-            <a:off x="11175999" y="1230312"/>
-            <a:ext cx="277813" cy="134937"/>
+            <a:off x="11461749" y="1142999"/>
+            <a:ext cx="190500" cy="95250"/>
           </a:xfrm>
           <a:prstGeom prst="line">
             <a:avLst/>
           </a:prstGeom>
-          <a:ln w="19716">
+          <a:ln w="18216">
             <a:solidFill>
               <a:srgbClr val="111A24"/>
             </a:solidFill>
@@ -5086,13 +5086,13 @@
         </p:nvCxnSpPr>
         <p:spPr>
           <a:xfrm flipH="1" flipV="1">
-            <a:off x="10898187" y="1230312"/>
-            <a:ext cx="277812" cy="134937"/>
+            <a:off x="11271249" y="1142999"/>
+            <a:ext cx="190500" cy="95250"/>
           </a:xfrm>
           <a:prstGeom prst="line">
             <a:avLst/>
           </a:prstGeom>
-          <a:ln w="19716">
+          <a:ln w="18216">
             <a:solidFill>
               <a:srgbClr val="111A24"/>
             </a:solidFill>
@@ -5122,13 +5122,13 @@
         </p:nvCxnSpPr>
         <p:spPr>
           <a:xfrm flipV="1">
-            <a:off x="10898187" y="1103312"/>
-            <a:ext cx="277812" cy="127000"/>
+            <a:off x="11271249" y="1047749"/>
+            <a:ext cx="190500" cy="95250"/>
           </a:xfrm>
           <a:prstGeom prst="line">
             <a:avLst/>
           </a:prstGeom>
-          <a:ln w="19716">
+          <a:ln w="18216">
             <a:solidFill>
               <a:srgbClr val="111A24"/>
             </a:solidFill>
@@ -5158,13 +5158,13 @@
         </p:nvCxnSpPr>
         <p:spPr>
           <a:xfrm>
-            <a:off x="11175999" y="1262062"/>
-            <a:ext cx="277813" cy="134937"/>
+            <a:off x="11461749" y="1166812"/>
+            <a:ext cx="190500" cy="87312"/>
           </a:xfrm>
           <a:prstGeom prst="line">
             <a:avLst/>
           </a:prstGeom>
-          <a:ln w="19716">
+          <a:ln w="18216">
             <a:solidFill>
               <a:srgbClr val="111A24"/>
             </a:solidFill>
@@ -5194,13 +5194,13 @@
         </p:nvCxnSpPr>
         <p:spPr>
           <a:xfrm flipH="1">
-            <a:off x="11175999" y="1396999"/>
-            <a:ext cx="277813" cy="127000"/>
+            <a:off x="11461749" y="1254124"/>
+            <a:ext cx="190500" cy="95250"/>
           </a:xfrm>
           <a:prstGeom prst="line">
             <a:avLst/>
           </a:prstGeom>
-          <a:ln w="19716">
+          <a:ln w="18216">
             <a:solidFill>
               <a:srgbClr val="111A24"/>
             </a:solidFill>
@@ -5230,13 +5230,13 @@
         </p:nvCxnSpPr>
         <p:spPr>
           <a:xfrm flipH="1" flipV="1">
-            <a:off x="10898187" y="1396999"/>
-            <a:ext cx="277812" cy="127000"/>
+            <a:off x="11271249" y="1254124"/>
+            <a:ext cx="190500" cy="95250"/>
           </a:xfrm>
           <a:prstGeom prst="line">
             <a:avLst/>
           </a:prstGeom>
-          <a:ln w="19716">
+          <a:ln w="18216">
             <a:solidFill>
               <a:srgbClr val="111A24"/>
             </a:solidFill>
@@ -5266,13 +5266,13 @@
         </p:nvCxnSpPr>
         <p:spPr>
           <a:xfrm flipV="1">
-            <a:off x="10898187" y="1262062"/>
-            <a:ext cx="277812" cy="134937"/>
+            <a:off x="11271249" y="1166812"/>
+            <a:ext cx="190500" cy="87312"/>
           </a:xfrm>
           <a:prstGeom prst="line">
             <a:avLst/>
           </a:prstGeom>
-          <a:ln w="19716">
+          <a:ln w="18216">
             <a:solidFill>
               <a:srgbClr val="111A24"/>
             </a:solidFill>
@@ -5302,13 +5302,13 @@
         </p:nvCxnSpPr>
         <p:spPr>
           <a:xfrm>
-            <a:off x="11175999" y="1420812"/>
-            <a:ext cx="277813" cy="134937"/>
+            <a:off x="11461749" y="1277937"/>
+            <a:ext cx="190500" cy="87312"/>
           </a:xfrm>
           <a:prstGeom prst="line">
             <a:avLst/>
           </a:prstGeom>
-          <a:ln w="19716">
+          <a:ln w="18216">
             <a:solidFill>
               <a:srgbClr val="111A24"/>
             </a:solidFill>
@@ -5338,13 +5338,13 @@
         </p:nvCxnSpPr>
         <p:spPr>
           <a:xfrm flipH="1">
-            <a:off x="11175999" y="1555749"/>
-            <a:ext cx="277813" cy="127000"/>
+            <a:off x="11461749" y="1365249"/>
+            <a:ext cx="190500" cy="95250"/>
           </a:xfrm>
           <a:prstGeom prst="line">
             <a:avLst/>
           </a:prstGeom>
-          <a:ln w="19716">
+          <a:ln w="18216">
             <a:solidFill>
               <a:srgbClr val="111A24"/>
             </a:solidFill>
@@ -5374,13 +5374,13 @@
         </p:nvCxnSpPr>
         <p:spPr>
           <a:xfrm flipH="1" flipV="1">
-            <a:off x="10898187" y="1555749"/>
-            <a:ext cx="277812" cy="127000"/>
+            <a:off x="11271249" y="1365249"/>
+            <a:ext cx="190500" cy="95250"/>
           </a:xfrm>
           <a:prstGeom prst="line">
             <a:avLst/>
           </a:prstGeom>
-          <a:ln w="19716">
+          <a:ln w="18216">
             <a:solidFill>
               <a:srgbClr val="111A24"/>
             </a:solidFill>
@@ -5410,13 +5410,13 @@
         </p:nvCxnSpPr>
         <p:spPr>
           <a:xfrm flipV="1">
-            <a:off x="10898187" y="1420812"/>
-            <a:ext cx="277812" cy="134937"/>
+            <a:off x="11271249" y="1277937"/>
+            <a:ext cx="190500" cy="87312"/>
           </a:xfrm>
           <a:prstGeom prst="line">
             <a:avLst/>
           </a:prstGeom>
-          <a:ln w="19716">
+          <a:ln w="18216">
             <a:solidFill>
               <a:srgbClr val="111A24"/>
             </a:solidFill>
@@ -5446,8 +5446,8 @@
         </p:nvSpPr>
         <p:spPr>
           <a:xfrm>
-            <a:off x="8715374" y="1809749"/>
-            <a:ext cx="2968624" cy="341312"/>
+            <a:off x="8588374" y="1579562"/>
+            <a:ext cx="3127374" cy="388937"/>
           </a:xfrm>
           <a:prstGeom prst="rect">
             <a:avLst/>
@@ -5463,7 +5463,7 @@
           <a:p>
             <a:pPr algn="ctr" fontAlgn="base">
               <a:lnSpc>
-                <a:spcPts val="2468"/>
+                <a:spcPts val="2812"/>
               </a:lnSpc>
               <a:spcBef>
                 <a:spcPts val="0"/>
@@ -5471,7 +5471,7 @@
               <a:spcAft>
                 <a:spcPts val="0"/>
               </a:spcAft>
-              <a:defRPr sz="1687" b="1" i="0" lang="zh-CN" dirty="0">
+              <a:defRPr sz="1937" b="1" i="0" lang="zh-CN" dirty="0">
                 <a:solidFill>
                   <a:srgbClr val="2B3E57"/>
                 </a:solidFill>
@@ -5481,7 +5481,7 @@
               </a:defRPr>
             </a:pPr>
             <a:r>
-              <a:rPr sz="1687" b="1" i="0" lang="zh-CN" dirty="0">
+              <a:rPr sz="1937" b="1" i="0" lang="zh-CN" dirty="0">
                 <a:solidFill>
                   <a:srgbClr val="2B3E57"/>
                 </a:solidFill>
@@ -5502,8 +5502,8 @@
         </p:nvCxnSpPr>
         <p:spPr>
           <a:xfrm>
-            <a:off x="8762999" y="2262187"/>
-            <a:ext cx="2873375" cy="0"/>
+            <a:off x="8635999" y="2063749"/>
+            <a:ext cx="3032125" cy="0"/>
           </a:xfrm>
           <a:prstGeom prst="line">
             <a:avLst/>
@@ -5538,12 +5538,12 @@
         </p:nvSpPr>
         <p:spPr>
           <a:xfrm>
-            <a:off x="8715374" y="2666999"/>
-            <a:ext cx="2968624" cy="285749"/>
+            <a:off x="8588374" y="2174874"/>
+            <a:ext cx="3127374" cy="396874"/>
           </a:xfrm>
           <a:prstGeom prst="roundRect">
             <a:avLst>
-              <a:gd name="adj" fmla="val 16666"/>
+              <a:gd name="adj" fmla="val 12000"/>
             </a:avLst>
           </a:prstGeom>
           <a:solidFill>
@@ -5586,8 +5586,8 @@
         </p:nvSpPr>
         <p:spPr>
           <a:xfrm>
-            <a:off x="8770937" y="2698749"/>
-            <a:ext cx="2857499" cy="222249"/>
+            <a:off x="8643937" y="2206624"/>
+            <a:ext cx="3016249" cy="333374"/>
           </a:xfrm>
           <a:prstGeom prst="rect">
             <a:avLst/>
@@ -5603,7 +5603,7 @@
           <a:p>
             <a:pPr algn="ctr" fontAlgn="base">
               <a:lnSpc>
-                <a:spcPts val="1718"/>
+                <a:spcPts val="2546"/>
               </a:lnSpc>
               <a:spcBef>
                 <a:spcPts val="0"/>
@@ -5611,7 +5611,7 @@
               <a:spcAft>
                 <a:spcPts val="0"/>
               </a:spcAft>
-              <a:defRPr sz="1185" b="1" i="0" lang="zh-CN" dirty="0">
+              <a:defRPr sz="1749" b="0" i="0" lang="zh-CN" dirty="0">
                 <a:solidFill>
                   <a:srgbClr val="27303A"/>
                 </a:solidFill>
@@ -5621,7 +5621,7 @@
               </a:defRPr>
             </a:pPr>
             <a:r>
-              <a:rPr sz="1185" b="1" i="0" lang="zh-CN" dirty="0">
+              <a:rPr sz="1749" b="0" i="0" lang="zh-CN" dirty="0">
                 <a:solidFill>
                   <a:srgbClr val="27303A"/>
                 </a:solidFill>
@@ -5632,7 +5632,7 @@
               <a:t>组成</a:t>
             </a:r>
             <a:r>
-              <a:rPr sz="1185" b="1" i="0" lang="zh-CN" dirty="0">
+              <a:rPr sz="1749" b="0" i="0" lang="zh-CN" dirty="0">
                 <a:solidFill>
                   <a:srgbClr val="27303A"/>
                 </a:solidFill>
@@ -5643,7 +5643,7 @@
               <a:t> · </a:t>
             </a:r>
             <a:r>
-              <a:rPr sz="1185" b="1" i="0" lang="zh-CN" dirty="0">
+              <a:rPr sz="1749" b="0" i="0" lang="zh-CN" dirty="0">
                 <a:solidFill>
                   <a:srgbClr val="27303A"/>
                 </a:solidFill>
@@ -5664,12 +5664,12 @@
         </p:nvSpPr>
         <p:spPr>
           <a:xfrm>
-            <a:off x="555624" y="4302124"/>
-            <a:ext cx="3333749" cy="2206624"/>
+            <a:off x="333374" y="4079874"/>
+            <a:ext cx="3492499" cy="1904999"/>
           </a:xfrm>
           <a:prstGeom prst="roundRect">
             <a:avLst>
-              <a:gd name="adj" fmla="val 3237"/>
+              <a:gd name="adj" fmla="val 3750"/>
             </a:avLst>
           </a:prstGeom>
           <a:solidFill>
@@ -5712,8 +5712,8 @@
         </p:nvSpPr>
         <p:spPr>
           <a:xfrm>
-            <a:off x="555624" y="4302124"/>
-            <a:ext cx="79374" cy="2206624"/>
+            <a:off x="333374" y="4079874"/>
+            <a:ext cx="79374" cy="1904999"/>
           </a:xfrm>
           <a:prstGeom prst="roundRect">
             <a:avLst>
@@ -5758,8 +5758,8 @@
         </p:nvSpPr>
         <p:spPr>
           <a:xfrm>
-            <a:off x="777874" y="4444999"/>
-            <a:ext cx="730249" cy="484187"/>
+            <a:off x="555624" y="4222749"/>
+            <a:ext cx="873124" cy="563562"/>
           </a:xfrm>
           <a:prstGeom prst="rect">
             <a:avLst/>
@@ -5775,7 +5775,7 @@
           <a:p>
             <a:pPr algn="l" fontAlgn="base">
               <a:lnSpc>
-                <a:spcPts val="2624"/>
+                <a:spcPts val="3062"/>
               </a:lnSpc>
               <a:spcBef>
                 <a:spcPts val="0"/>
@@ -5783,7 +5783,7 @@
               <a:spcAft>
                 <a:spcPts val="0"/>
               </a:spcAft>
-              <a:defRPr sz="2249" b="1" i="0" lang="zh-CN" dirty="0">
+              <a:defRPr sz="2624" b="1" i="0" lang="zh-CN" dirty="0">
                 <a:solidFill>
                   <a:srgbClr val="0F4F58"/>
                 </a:solidFill>
@@ -5793,7 +5793,7 @@
               </a:defRPr>
             </a:pPr>
             <a:r>
-              <a:rPr sz="2249" b="1" i="0" lang="zh-CN" dirty="0">
+              <a:rPr sz="2624" b="1" i="0" lang="zh-CN" dirty="0">
                 <a:solidFill>
                   <a:srgbClr val="0F4F58"/>
                 </a:solidFill>
@@ -5814,14 +5814,14 @@
         </p:nvSpPr>
         <p:spPr>
           <a:xfrm>
-            <a:off x="3135312" y="4468812"/>
-            <a:ext cx="206374" cy="206374"/>
+            <a:off x="3357562" y="4294187"/>
+            <a:ext cx="142874" cy="142874"/>
           </a:xfrm>
           <a:prstGeom prst="rect">
             <a:avLst/>
           </a:prstGeom>
           <a:noFill/>
-          <a:ln w="19716">
+          <a:ln w="18216">
             <a:solidFill>
               <a:srgbClr val="111A24"/>
             </a:solidFill>
@@ -5858,14 +5858,14 @@
         </p:nvSpPr>
         <p:spPr>
           <a:xfrm>
-            <a:off x="2920999" y="4849812"/>
-            <a:ext cx="206374" cy="206374"/>
+            <a:off x="3206749" y="4556124"/>
+            <a:ext cx="142874" cy="142874"/>
           </a:xfrm>
           <a:prstGeom prst="rect">
             <a:avLst/>
           </a:prstGeom>
           <a:noFill/>
-          <a:ln w="19716">
+          <a:ln w="18216">
             <a:solidFill>
               <a:srgbClr val="111A24"/>
             </a:solidFill>
@@ -5902,14 +5902,14 @@
         </p:nvSpPr>
         <p:spPr>
           <a:xfrm>
-            <a:off x="3357562" y="4849812"/>
-            <a:ext cx="206374" cy="206374"/>
+            <a:off x="3508374" y="4556124"/>
+            <a:ext cx="142874" cy="142874"/>
           </a:xfrm>
           <a:prstGeom prst="rect">
             <a:avLst/>
           </a:prstGeom>
           <a:noFill/>
-          <a:ln w="19716">
+          <a:ln w="18216">
             <a:solidFill>
               <a:srgbClr val="111A24"/>
             </a:solidFill>
@@ -5946,13 +5946,13 @@
         </p:nvCxnSpPr>
         <p:spPr>
           <a:xfrm flipH="1">
-            <a:off x="3016249" y="4675187"/>
-            <a:ext cx="222250" cy="174625"/>
+            <a:off x="3278187" y="4437062"/>
+            <a:ext cx="150812" cy="119062"/>
           </a:xfrm>
           <a:prstGeom prst="line">
             <a:avLst/>
           </a:prstGeom>
-          <a:ln w="19716">
+          <a:ln w="18216">
             <a:solidFill>
               <a:srgbClr val="111A24"/>
             </a:solidFill>
@@ -5982,13 +5982,13 @@
         </p:nvCxnSpPr>
         <p:spPr>
           <a:xfrm>
-            <a:off x="3238499" y="4675187"/>
-            <a:ext cx="222250" cy="174625"/>
+            <a:off x="3428999" y="4437062"/>
+            <a:ext cx="150813" cy="119062"/>
           </a:xfrm>
           <a:prstGeom prst="line">
             <a:avLst/>
           </a:prstGeom>
-          <a:ln w="19716">
+          <a:ln w="18216">
             <a:solidFill>
               <a:srgbClr val="111A24"/>
             </a:solidFill>
@@ -6018,8 +6018,8 @@
         </p:nvSpPr>
         <p:spPr>
           <a:xfrm>
-            <a:off x="777874" y="5222874"/>
-            <a:ext cx="2968624" cy="341312"/>
+            <a:off x="555624" y="4849812"/>
+            <a:ext cx="3127374" cy="388937"/>
           </a:xfrm>
           <a:prstGeom prst="rect">
             <a:avLst/>
@@ -6035,7 +6035,7 @@
           <a:p>
             <a:pPr algn="ctr" fontAlgn="base">
               <a:lnSpc>
-                <a:spcPts val="2468"/>
+                <a:spcPts val="2812"/>
               </a:lnSpc>
               <a:spcBef>
                 <a:spcPts val="0"/>
@@ -6043,7 +6043,7 @@
               <a:spcAft>
                 <a:spcPts val="0"/>
               </a:spcAft>
-              <a:defRPr sz="1687" b="1" i="0" lang="zh-CN" dirty="0">
+              <a:defRPr sz="1937" b="1" i="0" lang="zh-CN" dirty="0">
                 <a:solidFill>
                   <a:srgbClr val="0F4F58"/>
                 </a:solidFill>
@@ -6053,7 +6053,7 @@
               </a:defRPr>
             </a:pPr>
             <a:r>
-              <a:rPr sz="1687" b="1" i="0" lang="zh-CN" dirty="0">
+              <a:rPr sz="1937" b="1" i="0" lang="zh-CN" dirty="0">
                 <a:solidFill>
                   <a:srgbClr val="0F4F58"/>
                 </a:solidFill>
@@ -6074,8 +6074,8 @@
         </p:nvCxnSpPr>
         <p:spPr>
           <a:xfrm>
-            <a:off x="825499" y="5675312"/>
-            <a:ext cx="2873375" cy="0"/>
+            <a:off x="603249" y="5333999"/>
+            <a:ext cx="3032125" cy="0"/>
           </a:xfrm>
           <a:prstGeom prst="line">
             <a:avLst/>
@@ -6110,12 +6110,12 @@
         </p:nvSpPr>
         <p:spPr>
           <a:xfrm>
-            <a:off x="777874" y="6080124"/>
-            <a:ext cx="2968624" cy="285749"/>
+            <a:off x="555624" y="5445124"/>
+            <a:ext cx="3127374" cy="396874"/>
           </a:xfrm>
           <a:prstGeom prst="roundRect">
             <a:avLst>
-              <a:gd name="adj" fmla="val 16666"/>
+              <a:gd name="adj" fmla="val 12000"/>
             </a:avLst>
           </a:prstGeom>
           <a:solidFill>
@@ -6158,8 +6158,8 @@
         </p:nvSpPr>
         <p:spPr>
           <a:xfrm>
-            <a:off x="833437" y="6111874"/>
-            <a:ext cx="2857499" cy="222249"/>
+            <a:off x="611187" y="5476874"/>
+            <a:ext cx="3016249" cy="333374"/>
           </a:xfrm>
           <a:prstGeom prst="rect">
             <a:avLst/>
@@ -6175,7 +6175,7 @@
           <a:p>
             <a:pPr algn="ctr" fontAlgn="base">
               <a:lnSpc>
-                <a:spcPts val="1390"/>
+                <a:spcPts val="2046"/>
               </a:lnSpc>
               <a:spcBef>
                 <a:spcPts val="0"/>
@@ -6183,7 +6183,7 @@
               <a:spcAft>
                 <a:spcPts val="0"/>
               </a:spcAft>
-              <a:defRPr sz="1185" b="1" i="0" lang="zh-CN" dirty="0">
+              <a:defRPr sz="1749" b="0" i="0" lang="zh-CN" dirty="0">
                 <a:solidFill>
                   <a:srgbClr val="27303A"/>
                 </a:solidFill>
@@ -6193,7 +6193,7 @@
               </a:defRPr>
             </a:pPr>
             <a:r>
-              <a:rPr sz="1185" b="1" i="0" lang="zh-CN" dirty="0">
+              <a:rPr sz="1749" b="0" i="0" lang="zh-CN" dirty="0">
                 <a:solidFill>
                   <a:srgbClr val="27303A"/>
                 </a:solidFill>
@@ -6214,12 +6214,12 @@
         </p:nvSpPr>
         <p:spPr>
           <a:xfrm>
-            <a:off x="4524374" y="4302124"/>
-            <a:ext cx="3333749" cy="2206624"/>
+            <a:off x="4349749" y="4079874"/>
+            <a:ext cx="3492499" cy="1904999"/>
           </a:xfrm>
           <a:prstGeom prst="roundRect">
             <a:avLst>
-              <a:gd name="adj" fmla="val 3237"/>
+              <a:gd name="adj" fmla="val 3750"/>
             </a:avLst>
           </a:prstGeom>
           <a:solidFill>
@@ -6262,8 +6262,8 @@
         </p:nvSpPr>
         <p:spPr>
           <a:xfrm>
-            <a:off x="4524374" y="4302124"/>
-            <a:ext cx="79374" cy="2206624"/>
+            <a:off x="4349749" y="4079874"/>
+            <a:ext cx="79374" cy="1904999"/>
           </a:xfrm>
           <a:prstGeom prst="roundRect">
             <a:avLst>
@@ -6308,8 +6308,8 @@
         </p:nvSpPr>
         <p:spPr>
           <a:xfrm>
-            <a:off x="4746624" y="4444999"/>
-            <a:ext cx="730249" cy="484187"/>
+            <a:off x="4571999" y="4222749"/>
+            <a:ext cx="873124" cy="563562"/>
           </a:xfrm>
           <a:prstGeom prst="rect">
             <a:avLst/>
@@ -6325,7 +6325,7 @@
           <a:p>
             <a:pPr algn="l" fontAlgn="base">
               <a:lnSpc>
-                <a:spcPts val="2624"/>
+                <a:spcPts val="3062"/>
               </a:lnSpc>
               <a:spcBef>
                 <a:spcPts val="0"/>
@@ -6333,7 +6333,7 @@
               <a:spcAft>
                 <a:spcPts val="0"/>
               </a:spcAft>
-              <a:defRPr sz="2249" b="1" i="0" lang="zh-CN" dirty="0">
+              <a:defRPr sz="2624" b="1" i="0" lang="zh-CN" dirty="0">
                 <a:solidFill>
                   <a:srgbClr val="7A5410"/>
                 </a:solidFill>
@@ -6343,7 +6343,7 @@
               </a:defRPr>
             </a:pPr>
             <a:r>
-              <a:rPr sz="2249" b="1" i="0" lang="zh-CN" dirty="0">
+              <a:rPr sz="2624" b="1" i="0" lang="zh-CN" dirty="0">
                 <a:solidFill>
                   <a:srgbClr val="7A5410"/>
                 </a:solidFill>
@@ -6364,13 +6364,13 @@
         </p:nvCxnSpPr>
         <p:spPr>
           <a:xfrm>
-            <a:off x="7207249" y="4516437"/>
-            <a:ext cx="0" cy="468312"/>
+            <a:off x="7445374" y="4317999"/>
+            <a:ext cx="0" cy="325438"/>
           </a:xfrm>
           <a:prstGeom prst="line">
             <a:avLst/>
           </a:prstGeom>
-          <a:ln w="19716">
+          <a:ln w="18216">
             <a:solidFill>
               <a:srgbClr val="111A24"/>
             </a:solidFill>
@@ -6400,13 +6400,13 @@
         </p:nvCxnSpPr>
         <p:spPr>
           <a:xfrm>
-            <a:off x="6961187" y="4619624"/>
-            <a:ext cx="492125" cy="0"/>
+            <a:off x="7270749" y="4389437"/>
+            <a:ext cx="349250" cy="0"/>
           </a:xfrm>
           <a:prstGeom prst="line">
             <a:avLst/>
           </a:prstGeom>
-          <a:ln w="19716">
+          <a:ln w="18216">
             <a:solidFill>
               <a:srgbClr val="111A24"/>
             </a:solidFill>
@@ -6436,13 +6436,13 @@
         </p:nvCxnSpPr>
         <p:spPr>
           <a:xfrm flipH="1">
-            <a:off x="6889749" y="4619624"/>
-            <a:ext cx="71438" cy="158750"/>
+            <a:off x="7223124" y="4389437"/>
+            <a:ext cx="47625" cy="119062"/>
           </a:xfrm>
           <a:prstGeom prst="line">
             <a:avLst/>
           </a:prstGeom>
-          <a:ln w="19716">
+          <a:ln w="18216">
             <a:solidFill>
               <a:srgbClr val="111A24"/>
             </a:solidFill>
@@ -6472,13 +6472,13 @@
         </p:nvCxnSpPr>
         <p:spPr>
           <a:xfrm>
-            <a:off x="6889749" y="4778374"/>
-            <a:ext cx="142875" cy="0"/>
+            <a:off x="7223124" y="4508499"/>
+            <a:ext cx="103188" cy="0"/>
           </a:xfrm>
           <a:prstGeom prst="line">
             <a:avLst/>
           </a:prstGeom>
-          <a:ln w="19716">
+          <a:ln w="18216">
             <a:solidFill>
               <a:srgbClr val="111A24"/>
             </a:solidFill>
@@ -6508,13 +6508,13 @@
         </p:nvCxnSpPr>
         <p:spPr>
           <a:xfrm flipH="1" flipV="1">
-            <a:off x="6961187" y="4619624"/>
-            <a:ext cx="71437" cy="158750"/>
+            <a:off x="7270749" y="4389437"/>
+            <a:ext cx="55563" cy="119062"/>
           </a:xfrm>
           <a:prstGeom prst="line">
             <a:avLst/>
           </a:prstGeom>
-          <a:ln w="19716">
+          <a:ln w="18216">
             <a:solidFill>
               <a:srgbClr val="111A24"/>
             </a:solidFill>
@@ -6544,13 +6544,13 @@
         </p:nvCxnSpPr>
         <p:spPr>
           <a:xfrm flipH="1">
-            <a:off x="7381874" y="4619624"/>
-            <a:ext cx="71438" cy="158750"/>
+            <a:off x="7564437" y="4389437"/>
+            <a:ext cx="55562" cy="119062"/>
           </a:xfrm>
           <a:prstGeom prst="line">
             <a:avLst/>
           </a:prstGeom>
-          <a:ln w="19716">
+          <a:ln w="18216">
             <a:solidFill>
               <a:srgbClr val="111A24"/>
             </a:solidFill>
@@ -6580,13 +6580,13 @@
         </p:nvCxnSpPr>
         <p:spPr>
           <a:xfrm>
-            <a:off x="7381874" y="4778374"/>
-            <a:ext cx="142875" cy="0"/>
+            <a:off x="7564437" y="4508499"/>
+            <a:ext cx="103187" cy="0"/>
           </a:xfrm>
           <a:prstGeom prst="line">
             <a:avLst/>
           </a:prstGeom>
-          <a:ln w="19716">
+          <a:ln w="18216">
             <a:solidFill>
               <a:srgbClr val="111A24"/>
             </a:solidFill>
@@ -6616,13 +6616,13 @@
         </p:nvCxnSpPr>
         <p:spPr>
           <a:xfrm flipH="1" flipV="1">
-            <a:off x="7453312" y="4619624"/>
-            <a:ext cx="71437" cy="158750"/>
+            <a:off x="7619999" y="4389437"/>
+            <a:ext cx="47625" cy="119062"/>
           </a:xfrm>
           <a:prstGeom prst="line">
             <a:avLst/>
           </a:prstGeom>
-          <a:ln w="19716">
+          <a:ln w="18216">
             <a:solidFill>
               <a:srgbClr val="111A24"/>
             </a:solidFill>
@@ -6652,13 +6652,13 @@
         </p:nvCxnSpPr>
         <p:spPr>
           <a:xfrm>
-            <a:off x="7064374" y="5040312"/>
-            <a:ext cx="285750" cy="0"/>
+            <a:off x="7342187" y="4691062"/>
+            <a:ext cx="206375" cy="0"/>
           </a:xfrm>
           <a:prstGeom prst="line">
             <a:avLst/>
           </a:prstGeom>
-          <a:ln w="19716">
+          <a:ln w="18216">
             <a:solidFill>
               <a:srgbClr val="111A24"/>
             </a:solidFill>
@@ -6688,8 +6688,8 @@
         </p:nvSpPr>
         <p:spPr>
           <a:xfrm>
-            <a:off x="4746624" y="5222874"/>
-            <a:ext cx="2968624" cy="341312"/>
+            <a:off x="4571999" y="4849812"/>
+            <a:ext cx="3127374" cy="388937"/>
           </a:xfrm>
           <a:prstGeom prst="rect">
             <a:avLst/>
@@ -6705,7 +6705,7 @@
           <a:p>
             <a:pPr algn="ctr" fontAlgn="base">
               <a:lnSpc>
-                <a:spcPts val="2468"/>
+                <a:spcPts val="2812"/>
               </a:lnSpc>
               <a:spcBef>
                 <a:spcPts val="0"/>
@@ -6713,7 +6713,7 @@
               <a:spcAft>
                 <a:spcPts val="0"/>
               </a:spcAft>
-              <a:defRPr sz="1687" b="1" i="0" lang="zh-CN" dirty="0">
+              <a:defRPr sz="1937" b="1" i="0" lang="zh-CN" dirty="0">
                 <a:solidFill>
                   <a:srgbClr val="7A5410"/>
                 </a:solidFill>
@@ -6723,7 +6723,7 @@
               </a:defRPr>
             </a:pPr>
             <a:r>
-              <a:rPr sz="1687" b="1" i="0" lang="zh-CN" dirty="0">
+              <a:rPr sz="1937" b="1" i="0" lang="zh-CN" dirty="0">
                 <a:solidFill>
                   <a:srgbClr val="7A5410"/>
                 </a:solidFill>
@@ -6744,8 +6744,8 @@
         </p:nvCxnSpPr>
         <p:spPr>
           <a:xfrm>
-            <a:off x="4794249" y="5675312"/>
-            <a:ext cx="2873375" cy="0"/>
+            <a:off x="4619624" y="5333999"/>
+            <a:ext cx="3032125" cy="0"/>
           </a:xfrm>
           <a:prstGeom prst="line">
             <a:avLst/>
@@ -6780,12 +6780,12 @@
         </p:nvSpPr>
         <p:spPr>
           <a:xfrm>
-            <a:off x="4746624" y="6080124"/>
-            <a:ext cx="2968624" cy="285749"/>
+            <a:off x="4571999" y="5445124"/>
+            <a:ext cx="3127374" cy="396874"/>
           </a:xfrm>
           <a:prstGeom prst="roundRect">
             <a:avLst>
-              <a:gd name="adj" fmla="val 16666"/>
+              <a:gd name="adj" fmla="val 12000"/>
             </a:avLst>
           </a:prstGeom>
           <a:solidFill>
@@ -6828,8 +6828,8 @@
         </p:nvSpPr>
         <p:spPr>
           <a:xfrm>
-            <a:off x="4802187" y="6111874"/>
-            <a:ext cx="2857499" cy="222249"/>
+            <a:off x="4627562" y="5476874"/>
+            <a:ext cx="3016249" cy="333374"/>
           </a:xfrm>
           <a:prstGeom prst="rect">
             <a:avLst/>
@@ -6845,7 +6845,7 @@
           <a:p>
             <a:pPr algn="ctr" fontAlgn="base">
               <a:lnSpc>
-                <a:spcPts val="1390"/>
+                <a:spcPts val="2046"/>
               </a:lnSpc>
               <a:spcBef>
                 <a:spcPts val="0"/>
@@ -6853,7 +6853,7 @@
               <a:spcAft>
                 <a:spcPts val="0"/>
               </a:spcAft>
-              <a:defRPr sz="1185" b="1" i="0" lang="zh-CN" dirty="0">
+              <a:defRPr sz="1749" b="0" i="0" lang="zh-CN" dirty="0">
                 <a:solidFill>
                   <a:srgbClr val="27303A"/>
                 </a:solidFill>
@@ -6863,7 +6863,7 @@
               </a:defRPr>
             </a:pPr>
             <a:r>
-              <a:rPr sz="1185" b="1" i="0" lang="zh-CN" dirty="0">
+              <a:rPr sz="1749" b="0" i="0" lang="zh-CN" dirty="0">
                 <a:solidFill>
                   <a:srgbClr val="27303A"/>
                 </a:solidFill>
@@ -6884,12 +6884,12 @@
         </p:nvSpPr>
         <p:spPr>
           <a:xfrm>
-            <a:off x="8493124" y="4302124"/>
-            <a:ext cx="3333749" cy="2206624"/>
+            <a:off x="8366124" y="4079874"/>
+            <a:ext cx="3492499" cy="1904999"/>
           </a:xfrm>
           <a:prstGeom prst="roundRect">
             <a:avLst>
-              <a:gd name="adj" fmla="val 3237"/>
+              <a:gd name="adj" fmla="val 3750"/>
             </a:avLst>
           </a:prstGeom>
           <a:solidFill>
@@ -6932,8 +6932,8 @@
         </p:nvSpPr>
         <p:spPr>
           <a:xfrm>
-            <a:off x="8493124" y="4302124"/>
-            <a:ext cx="79374" cy="2206624"/>
+            <a:off x="8366124" y="4079874"/>
+            <a:ext cx="79374" cy="1904999"/>
           </a:xfrm>
           <a:prstGeom prst="roundRect">
             <a:avLst>
@@ -6978,8 +6978,8 @@
         </p:nvSpPr>
         <p:spPr>
           <a:xfrm>
-            <a:off x="8715374" y="4444999"/>
-            <a:ext cx="730249" cy="484187"/>
+            <a:off x="8588374" y="4222749"/>
+            <a:ext cx="873124" cy="563562"/>
           </a:xfrm>
           <a:prstGeom prst="rect">
             <a:avLst/>
@@ -6995,7 +6995,7 @@
           <a:p>
             <a:pPr algn="l" fontAlgn="base">
               <a:lnSpc>
-                <a:spcPts val="2624"/>
+                <a:spcPts val="3062"/>
               </a:lnSpc>
               <a:spcBef>
                 <a:spcPts val="0"/>
@@ -7003,7 +7003,7 @@
               <a:spcAft>
                 <a:spcPts val="0"/>
               </a:spcAft>
-              <a:defRPr sz="2249" b="1" i="0" lang="zh-CN" dirty="0">
+              <a:defRPr sz="2624" b="1" i="0" lang="zh-CN" dirty="0">
                 <a:solidFill>
                   <a:srgbClr val="0F4F58"/>
                 </a:solidFill>
@@ -7013,7 +7013,7 @@
               </a:defRPr>
             </a:pPr>
             <a:r>
-              <a:rPr sz="2249" b="1" i="0" lang="zh-CN" dirty="0">
+              <a:rPr sz="2624" b="1" i="0" lang="zh-CN" dirty="0">
                 <a:solidFill>
                   <a:srgbClr val="0F4F58"/>
                 </a:solidFill>
@@ -7034,14 +7034,14 @@
         </p:nvSpPr>
         <p:spPr>
           <a:xfrm>
-            <a:off x="10898187" y="4556124"/>
-            <a:ext cx="142874" cy="142874"/>
+            <a:off x="11271249" y="4349749"/>
+            <a:ext cx="103187" cy="103187"/>
           </a:xfrm>
           <a:prstGeom prst="rect">
             <a:avLst/>
           </a:prstGeom>
           <a:noFill/>
-          <a:ln w="19716">
+          <a:ln w="18216">
             <a:solidFill>
               <a:srgbClr val="111A24"/>
             </a:solidFill>
@@ -7078,13 +7078,13 @@
         </p:nvCxnSpPr>
         <p:spPr>
           <a:xfrm>
-            <a:off x="11128374" y="4635499"/>
-            <a:ext cx="341313" cy="0"/>
+            <a:off x="11429999" y="4405312"/>
+            <a:ext cx="238125" cy="0"/>
           </a:xfrm>
           <a:prstGeom prst="line">
             <a:avLst/>
           </a:prstGeom>
-          <a:ln w="19716">
+          <a:ln w="18216">
             <a:solidFill>
               <a:srgbClr val="111A24"/>
             </a:solidFill>
@@ -7114,13 +7114,13 @@
         </p:nvCxnSpPr>
         <p:spPr>
           <a:xfrm>
-            <a:off x="10929937" y="4643437"/>
-            <a:ext cx="31750" cy="31750"/>
+            <a:off x="11287124" y="4405312"/>
+            <a:ext cx="23813" cy="31750"/>
           </a:xfrm>
           <a:prstGeom prst="line">
             <a:avLst/>
           </a:prstGeom>
-          <a:ln w="19716">
+          <a:ln w="18216">
             <a:solidFill>
               <a:srgbClr val="111A24"/>
             </a:solidFill>
@@ -7150,13 +7150,13 @@
         </p:nvCxnSpPr>
         <p:spPr>
           <a:xfrm flipV="1">
-            <a:off x="10961687" y="4587874"/>
-            <a:ext cx="71437" cy="87313"/>
+            <a:off x="11310937" y="4373562"/>
+            <a:ext cx="47625" cy="63500"/>
           </a:xfrm>
           <a:prstGeom prst="line">
             <a:avLst/>
           </a:prstGeom>
-          <a:ln w="19716">
+          <a:ln w="18216">
             <a:solidFill>
               <a:srgbClr val="111A24"/>
             </a:solidFill>
@@ -7186,14 +7186,14 @@
         </p:nvSpPr>
         <p:spPr>
           <a:xfrm>
-            <a:off x="10898187" y="4746624"/>
-            <a:ext cx="142874" cy="142874"/>
+            <a:off x="11271249" y="4484687"/>
+            <a:ext cx="103187" cy="103187"/>
           </a:xfrm>
           <a:prstGeom prst="rect">
             <a:avLst/>
           </a:prstGeom>
           <a:noFill/>
-          <a:ln w="19716">
+          <a:ln w="18216">
             <a:solidFill>
               <a:srgbClr val="111A24"/>
             </a:solidFill>
@@ -7230,13 +7230,13 @@
         </p:nvCxnSpPr>
         <p:spPr>
           <a:xfrm>
-            <a:off x="11128374" y="4825999"/>
-            <a:ext cx="341313" cy="0"/>
+            <a:off x="11429999" y="4532312"/>
+            <a:ext cx="238125" cy="0"/>
           </a:xfrm>
           <a:prstGeom prst="line">
             <a:avLst/>
           </a:prstGeom>
-          <a:ln w="19716">
+          <a:ln w="18216">
             <a:solidFill>
               <a:srgbClr val="111A24"/>
             </a:solidFill>
@@ -7266,13 +7266,13 @@
         </p:nvCxnSpPr>
         <p:spPr>
           <a:xfrm>
-            <a:off x="10929937" y="4825999"/>
-            <a:ext cx="31750" cy="39688"/>
+            <a:off x="11287124" y="4540249"/>
+            <a:ext cx="23813" cy="23813"/>
           </a:xfrm>
           <a:prstGeom prst="line">
             <a:avLst/>
           </a:prstGeom>
-          <a:ln w="19716">
+          <a:ln w="18216">
             <a:solidFill>
               <a:srgbClr val="111A24"/>
             </a:solidFill>
@@ -7302,13 +7302,13 @@
         </p:nvCxnSpPr>
         <p:spPr>
           <a:xfrm flipV="1">
-            <a:off x="10961687" y="4778374"/>
-            <a:ext cx="71437" cy="87313"/>
+            <a:off x="11310937" y="4508499"/>
+            <a:ext cx="47625" cy="55563"/>
           </a:xfrm>
           <a:prstGeom prst="line">
             <a:avLst/>
           </a:prstGeom>
-          <a:ln w="19716">
+          <a:ln w="18216">
             <a:solidFill>
               <a:srgbClr val="111A24"/>
             </a:solidFill>
@@ -7338,14 +7338,14 @@
         </p:nvSpPr>
         <p:spPr>
           <a:xfrm>
-            <a:off x="10898187" y="4937124"/>
-            <a:ext cx="142874" cy="142874"/>
+            <a:off x="11271249" y="4619624"/>
+            <a:ext cx="103187" cy="103187"/>
           </a:xfrm>
           <a:prstGeom prst="rect">
             <a:avLst/>
           </a:prstGeom>
           <a:noFill/>
-          <a:ln w="19716">
+          <a:ln w="18216">
             <a:solidFill>
               <a:srgbClr val="111A24"/>
             </a:solidFill>
@@ -7382,13 +7382,13 @@
         </p:nvCxnSpPr>
         <p:spPr>
           <a:xfrm>
-            <a:off x="11128374" y="5008562"/>
-            <a:ext cx="341313" cy="0"/>
+            <a:off x="11429999" y="4667249"/>
+            <a:ext cx="238125" cy="0"/>
           </a:xfrm>
           <a:prstGeom prst="line">
             <a:avLst/>
           </a:prstGeom>
-          <a:ln w="19716">
+          <a:ln w="18216">
             <a:solidFill>
               <a:srgbClr val="111A24"/>
             </a:solidFill>
@@ -7418,8 +7418,8 @@
         </p:nvSpPr>
         <p:spPr>
           <a:xfrm>
-            <a:off x="8715374" y="5222874"/>
-            <a:ext cx="2968624" cy="341312"/>
+            <a:off x="8588374" y="4849812"/>
+            <a:ext cx="3127374" cy="388937"/>
           </a:xfrm>
           <a:prstGeom prst="rect">
             <a:avLst/>
@@ -7435,7 +7435,7 @@
           <a:p>
             <a:pPr algn="ctr" fontAlgn="base">
               <a:lnSpc>
-                <a:spcPts val="2468"/>
+                <a:spcPts val="2812"/>
               </a:lnSpc>
               <a:spcBef>
                 <a:spcPts val="0"/>
@@ -7443,7 +7443,7 @@
               <a:spcAft>
                 <a:spcPts val="0"/>
               </a:spcAft>
-              <a:defRPr sz="1687" b="1" i="0" lang="zh-CN" dirty="0">
+              <a:defRPr sz="1937" b="1" i="0" lang="zh-CN" dirty="0">
                 <a:solidFill>
                   <a:srgbClr val="0F4F58"/>
                 </a:solidFill>
@@ -7453,7 +7453,7 @@
               </a:defRPr>
             </a:pPr>
             <a:r>
-              <a:rPr sz="1687" b="1" i="0" lang="zh-CN" dirty="0">
+              <a:rPr sz="1937" b="1" i="0" lang="zh-CN" dirty="0">
                 <a:solidFill>
                   <a:srgbClr val="0F4F58"/>
                 </a:solidFill>
@@ -7474,8 +7474,8 @@
         </p:nvCxnSpPr>
         <p:spPr>
           <a:xfrm>
-            <a:off x="8762999" y="5675312"/>
-            <a:ext cx="2873375" cy="0"/>
+            <a:off x="8635999" y="5333999"/>
+            <a:ext cx="3032125" cy="0"/>
           </a:xfrm>
           <a:prstGeom prst="line">
             <a:avLst/>
@@ -7510,12 +7510,12 @@
         </p:nvSpPr>
         <p:spPr>
           <a:xfrm>
-            <a:off x="8715374" y="6080124"/>
-            <a:ext cx="2968624" cy="285749"/>
+            <a:off x="8588374" y="5445124"/>
+            <a:ext cx="3127374" cy="396874"/>
           </a:xfrm>
           <a:prstGeom prst="roundRect">
             <a:avLst>
-              <a:gd name="adj" fmla="val 16666"/>
+              <a:gd name="adj" fmla="val 12000"/>
             </a:avLst>
           </a:prstGeom>
           <a:solidFill>
@@ -7558,8 +7558,8 @@
         </p:nvSpPr>
         <p:spPr>
           <a:xfrm>
-            <a:off x="8770937" y="6111874"/>
-            <a:ext cx="2857499" cy="222249"/>
+            <a:off x="8643937" y="5476874"/>
+            <a:ext cx="3016249" cy="333374"/>
           </a:xfrm>
           <a:prstGeom prst="rect">
             <a:avLst/>
@@ -7575,7 +7575,7 @@
           <a:p>
             <a:pPr algn="ctr" fontAlgn="base">
               <a:lnSpc>
-                <a:spcPts val="1718"/>
+                <a:spcPts val="2546"/>
               </a:lnSpc>
               <a:spcBef>
                 <a:spcPts val="0"/>
@@ -7583,7 +7583,7 @@
               <a:spcAft>
                 <a:spcPts val="0"/>
               </a:spcAft>
-              <a:defRPr sz="1185" b="1" i="0" lang="zh-CN" dirty="0">
+              <a:defRPr sz="1749" b="0" i="0" lang="zh-CN" dirty="0">
                 <a:solidFill>
                   <a:srgbClr val="27303A"/>
                 </a:solidFill>
@@ -7593,7 +7593,7 @@
               </a:defRPr>
             </a:pPr>
             <a:r>
-              <a:rPr sz="1185" b="1" i="0" lang="zh-CN" dirty="0">
+              <a:rPr sz="1749" b="0" i="0" lang="zh-CN" dirty="0">
                 <a:solidFill>
                   <a:srgbClr val="27303A"/>
                 </a:solidFill>
@@ -7604,7 +7604,7 @@
               <a:t>相图</a:t>
             </a:r>
             <a:r>
-              <a:rPr sz="1185" b="1" i="0" lang="zh-CN" dirty="0">
+              <a:rPr sz="1749" b="0" i="0" lang="zh-CN" dirty="0">
                 <a:solidFill>
                   <a:srgbClr val="27303A"/>
                 </a:solidFill>
@@ -7615,7 +7615,7 @@
               <a:t> · </a:t>
             </a:r>
             <a:r>
-              <a:rPr sz="1185" b="1" i="0" lang="zh-CN" dirty="0">
+              <a:rPr sz="1749" b="0" i="0" lang="zh-CN" dirty="0">
                 <a:solidFill>
                   <a:srgbClr val="27303A"/>
                 </a:solidFill>
@@ -7626,7 +7626,7 @@
               <a:t>结构</a:t>
             </a:r>
             <a:r>
-              <a:rPr sz="1185" b="1" i="0" lang="zh-CN" dirty="0">
+              <a:rPr sz="1749" b="0" i="0" lang="zh-CN" dirty="0">
                 <a:solidFill>
                   <a:srgbClr val="27303A"/>
                 </a:solidFill>
@@ -7637,7 +7637,7 @@
               <a:t> · </a:t>
             </a:r>
             <a:r>
-              <a:rPr sz="1185" b="1" i="0" lang="zh-CN" dirty="0">
+              <a:rPr sz="1749" b="0" i="0" lang="zh-CN" dirty="0">
                 <a:solidFill>
                   <a:srgbClr val="27303A"/>
                 </a:solidFill>
@@ -7658,8 +7658,8 @@
         </p:nvSpPr>
         <p:spPr>
           <a:xfrm>
-            <a:off x="3952875" y="1944687"/>
-            <a:ext cx="508000" cy="95250"/>
+            <a:off x="3873500" y="1714500"/>
+            <a:ext cx="428625" cy="95250"/>
           </a:xfrm>
           <a:custGeom>
             <a:avLst/>
@@ -7668,24 +7668,24 @@
             <a:cxnLst/>
             <a:rect l="l" t="t" r="r" b="b"/>
             <a:pathLst>
-              <a:path w="64000" h="12000">
+              <a:path w="54000" h="12000">
                 <a:moveTo>
                   <a:pt x="0" y="4750"/>
                 </a:moveTo>
                 <a:lnTo>
-                  <a:pt x="49000" y="4750"/>
+                  <a:pt x="39000" y="4750"/>
                 </a:lnTo>
                 <a:lnTo>
-                  <a:pt x="49000" y="0"/>
+                  <a:pt x="39000" y="0"/>
                 </a:lnTo>
                 <a:lnTo>
-                  <a:pt x="64000" y="6000"/>
+                  <a:pt x="54000" y="6000"/>
                 </a:lnTo>
                 <a:lnTo>
-                  <a:pt x="49000" y="12000"/>
+                  <a:pt x="39000" y="12000"/>
                 </a:lnTo>
                 <a:lnTo>
-                  <a:pt x="49000" y="7250"/>
+                  <a:pt x="39000" y="7250"/>
                 </a:lnTo>
                 <a:lnTo>
                   <a:pt x="0" y="7250"/>
@@ -7732,8 +7732,8 @@
         </p:nvSpPr>
         <p:spPr>
           <a:xfrm>
-            <a:off x="3778249" y="460374"/>
-            <a:ext cx="857249" cy="309562"/>
+            <a:off x="3532187" y="301624"/>
+            <a:ext cx="1111249" cy="404812"/>
           </a:xfrm>
           <a:prstGeom prst="roundRect">
             <a:avLst>
@@ -7780,8 +7780,8 @@
         </p:nvSpPr>
         <p:spPr>
           <a:xfrm>
-            <a:off x="3857624" y="492124"/>
-            <a:ext cx="698499" cy="246062"/>
+            <a:off x="3611562" y="333374"/>
+            <a:ext cx="952499" cy="341312"/>
           </a:xfrm>
           <a:prstGeom prst="rect">
             <a:avLst/>
@@ -7797,7 +7797,7 @@
           <a:p>
             <a:pPr algn="ctr" fontAlgn="base">
               <a:lnSpc>
-                <a:spcPts val="1640"/>
+                <a:spcPts val="2359"/>
               </a:lnSpc>
               <a:spcBef>
                 <a:spcPts val="0"/>
@@ -7805,7 +7805,7 @@
               <a:spcAft>
                 <a:spcPts val="0"/>
               </a:spcAft>
-              <a:defRPr sz="1124" b="1" i="0" lang="zh-CN" dirty="0">
+              <a:defRPr sz="1624" b="0" i="0" lang="zh-CN" dirty="0">
                 <a:solidFill>
                   <a:srgbClr val="27303A"/>
                 </a:solidFill>
@@ -7815,7 +7815,7 @@
               </a:defRPr>
             </a:pPr>
             <a:r>
-              <a:rPr sz="1124" b="1" i="0" lang="zh-CN" dirty="0">
+              <a:rPr sz="1624" b="0" i="0" lang="zh-CN" dirty="0">
                 <a:solidFill>
                   <a:srgbClr val="27303A"/>
                 </a:solidFill>
@@ -7836,8 +7836,8 @@
         </p:nvSpPr>
         <p:spPr>
           <a:xfrm>
-            <a:off x="7921625" y="1944687"/>
-            <a:ext cx="508000" cy="95250"/>
+            <a:off x="7889875" y="1714500"/>
+            <a:ext cx="428625" cy="95250"/>
           </a:xfrm>
           <a:custGeom>
             <a:avLst/>
@@ -7846,24 +7846,24 @@
             <a:cxnLst/>
             <a:rect l="l" t="t" r="r" b="b"/>
             <a:pathLst>
-              <a:path w="64000" h="12000">
+              <a:path w="54000" h="12000">
                 <a:moveTo>
                   <a:pt x="0" y="4750"/>
                 </a:moveTo>
                 <a:lnTo>
-                  <a:pt x="49000" y="4750"/>
+                  <a:pt x="39000" y="4750"/>
                 </a:lnTo>
                 <a:lnTo>
-                  <a:pt x="49000" y="0"/>
+                  <a:pt x="39000" y="0"/>
                 </a:lnTo>
                 <a:lnTo>
-                  <a:pt x="64000" y="6000"/>
+                  <a:pt x="54000" y="6000"/>
                 </a:lnTo>
                 <a:lnTo>
-                  <a:pt x="49000" y="12000"/>
+                  <a:pt x="39000" y="12000"/>
                 </a:lnTo>
                 <a:lnTo>
-                  <a:pt x="49000" y="7250"/>
+                  <a:pt x="39000" y="7250"/>
                 </a:lnTo>
                 <a:lnTo>
                   <a:pt x="0" y="7250"/>
@@ -7910,8 +7910,8 @@
         </p:nvSpPr>
         <p:spPr>
           <a:xfrm>
-            <a:off x="7746999" y="460374"/>
-            <a:ext cx="857249" cy="309562"/>
+            <a:off x="7548562" y="301624"/>
+            <a:ext cx="1111249" cy="404812"/>
           </a:xfrm>
           <a:prstGeom prst="roundRect">
             <a:avLst>
@@ -7958,8 +7958,8 @@
         </p:nvSpPr>
         <p:spPr>
           <a:xfrm>
-            <a:off x="7826374" y="492124"/>
-            <a:ext cx="698499" cy="246062"/>
+            <a:off x="7627937" y="333374"/>
+            <a:ext cx="952499" cy="341312"/>
           </a:xfrm>
           <a:prstGeom prst="rect">
             <a:avLst/>
@@ -7975,7 +7975,7 @@
           <a:p>
             <a:pPr algn="ctr" fontAlgn="base">
               <a:lnSpc>
-                <a:spcPts val="1640"/>
+                <a:spcPts val="2359"/>
               </a:lnSpc>
               <a:spcBef>
                 <a:spcPts val="0"/>
@@ -7983,7 +7983,7 @@
               <a:spcAft>
                 <a:spcPts val="0"/>
               </a:spcAft>
-              <a:defRPr sz="1124" b="1" i="0" lang="zh-CN" dirty="0">
+              <a:defRPr sz="1624" b="0" i="0" lang="zh-CN" dirty="0">
                 <a:solidFill>
                   <a:srgbClr val="27303A"/>
                 </a:solidFill>
@@ -7993,7 +7993,7 @@
               </a:defRPr>
             </a:pPr>
             <a:r>
-              <a:rPr sz="1124" b="1" i="0" lang="zh-CN" dirty="0">
+              <a:rPr sz="1624" b="0" i="0" lang="zh-CN" dirty="0">
                 <a:solidFill>
                   <a:srgbClr val="27303A"/>
                 </a:solidFill>
@@ -8014,8 +8014,8 @@
         </p:nvSpPr>
         <p:spPr>
           <a:xfrm>
-            <a:off x="3952875" y="5357812"/>
-            <a:ext cx="508000" cy="95250"/>
+            <a:off x="3873500" y="4984750"/>
+            <a:ext cx="428625" cy="95250"/>
           </a:xfrm>
           <a:custGeom>
             <a:avLst/>
@@ -8024,24 +8024,24 @@
             <a:cxnLst/>
             <a:rect l="l" t="t" r="r" b="b"/>
             <a:pathLst>
-              <a:path w="64000" h="12000">
+              <a:path w="54000" h="12000">
                 <a:moveTo>
                   <a:pt x="0" y="4750"/>
                 </a:moveTo>
                 <a:lnTo>
-                  <a:pt x="49000" y="4750"/>
+                  <a:pt x="39000" y="4750"/>
                 </a:lnTo>
                 <a:lnTo>
-                  <a:pt x="49000" y="0"/>
+                  <a:pt x="39000" y="0"/>
                 </a:lnTo>
                 <a:lnTo>
-                  <a:pt x="64000" y="6000"/>
+                  <a:pt x="54000" y="6000"/>
                 </a:lnTo>
                 <a:lnTo>
-                  <a:pt x="49000" y="12000"/>
+                  <a:pt x="39000" y="12000"/>
                 </a:lnTo>
                 <a:lnTo>
-                  <a:pt x="49000" y="7250"/>
+                  <a:pt x="39000" y="7250"/>
                 </a:lnTo>
                 <a:lnTo>
                   <a:pt x="0" y="7250"/>
@@ -8088,8 +8088,8 @@
         </p:nvSpPr>
         <p:spPr>
           <a:xfrm>
-            <a:off x="3778249" y="3873499"/>
-            <a:ext cx="857249" cy="309562"/>
+            <a:off x="3532187" y="3571874"/>
+            <a:ext cx="1111249" cy="404812"/>
           </a:xfrm>
           <a:prstGeom prst="roundRect">
             <a:avLst>
@@ -8136,8 +8136,8 @@
         </p:nvSpPr>
         <p:spPr>
           <a:xfrm>
-            <a:off x="3857624" y="3905249"/>
-            <a:ext cx="698499" cy="246062"/>
+            <a:off x="3611562" y="3603624"/>
+            <a:ext cx="952499" cy="341312"/>
           </a:xfrm>
           <a:prstGeom prst="rect">
             <a:avLst/>
@@ -8153,7 +8153,7 @@
           <a:p>
             <a:pPr algn="ctr" fontAlgn="base">
               <a:lnSpc>
-                <a:spcPts val="1640"/>
+                <a:spcPts val="2359"/>
               </a:lnSpc>
               <a:spcBef>
                 <a:spcPts val="0"/>
@@ -8161,7 +8161,7 @@
               <a:spcAft>
                 <a:spcPts val="0"/>
               </a:spcAft>
-              <a:defRPr sz="1124" b="1" i="0" lang="zh-CN" dirty="0">
+              <a:defRPr sz="1624" b="0" i="0" lang="zh-CN" dirty="0">
                 <a:solidFill>
                   <a:srgbClr val="27303A"/>
                 </a:solidFill>
@@ -8171,7 +8171,7 @@
               </a:defRPr>
             </a:pPr>
             <a:r>
-              <a:rPr sz="1124" b="1" i="0" lang="zh-CN" dirty="0">
+              <a:rPr sz="1624" b="0" i="0" lang="zh-CN" dirty="0">
                 <a:solidFill>
                   <a:srgbClr val="27303A"/>
                 </a:solidFill>
@@ -8192,8 +8192,8 @@
         </p:nvSpPr>
         <p:spPr>
           <a:xfrm>
-            <a:off x="7921625" y="5357812"/>
-            <a:ext cx="508000" cy="95250"/>
+            <a:off x="7889875" y="4984750"/>
+            <a:ext cx="428625" cy="95250"/>
           </a:xfrm>
           <a:custGeom>
             <a:avLst/>
@@ -8202,24 +8202,24 @@
             <a:cxnLst/>
             <a:rect l="l" t="t" r="r" b="b"/>
             <a:pathLst>
-              <a:path w="64000" h="12000">
+              <a:path w="54000" h="12000">
                 <a:moveTo>
                   <a:pt x="0" y="4750"/>
                 </a:moveTo>
                 <a:lnTo>
-                  <a:pt x="49000" y="4750"/>
+                  <a:pt x="39000" y="4750"/>
                 </a:lnTo>
                 <a:lnTo>
-                  <a:pt x="49000" y="0"/>
+                  <a:pt x="39000" y="0"/>
                 </a:lnTo>
                 <a:lnTo>
-                  <a:pt x="64000" y="6000"/>
+                  <a:pt x="54000" y="6000"/>
                 </a:lnTo>
                 <a:lnTo>
-                  <a:pt x="49000" y="12000"/>
+                  <a:pt x="39000" y="12000"/>
                 </a:lnTo>
                 <a:lnTo>
-                  <a:pt x="49000" y="7250"/>
+                  <a:pt x="39000" y="7250"/>
                 </a:lnTo>
                 <a:lnTo>
                   <a:pt x="0" y="7250"/>
@@ -8266,8 +8266,8 @@
         </p:nvSpPr>
         <p:spPr>
           <a:xfrm>
-            <a:off x="7746999" y="3873499"/>
-            <a:ext cx="857249" cy="309562"/>
+            <a:off x="7548562" y="3571874"/>
+            <a:ext cx="1111249" cy="404812"/>
           </a:xfrm>
           <a:prstGeom prst="roundRect">
             <a:avLst>
@@ -8314,8 +8314,8 @@
         </p:nvSpPr>
         <p:spPr>
           <a:xfrm>
-            <a:off x="7826374" y="3905249"/>
-            <a:ext cx="698499" cy="246062"/>
+            <a:off x="7627937" y="3603624"/>
+            <a:ext cx="952499" cy="341312"/>
           </a:xfrm>
           <a:prstGeom prst="rect">
             <a:avLst/>
@@ -8331,7 +8331,7 @@
           <a:p>
             <a:pPr algn="ctr" fontAlgn="base">
               <a:lnSpc>
-                <a:spcPts val="1640"/>
+                <a:spcPts val="2359"/>
               </a:lnSpc>
               <a:spcBef>
                 <a:spcPts val="0"/>
@@ -8339,7 +8339,7 @@
               <a:spcAft>
                 <a:spcPts val="0"/>
               </a:spcAft>
-              <a:defRPr sz="1124" b="1" i="0" lang="zh-CN" dirty="0">
+              <a:defRPr sz="1624" b="0" i="0" lang="zh-CN" dirty="0">
                 <a:solidFill>
                   <a:srgbClr val="27303A"/>
                 </a:solidFill>
@@ -8349,7 +8349,7 @@
               </a:defRPr>
             </a:pPr>
             <a:r>
-              <a:rPr sz="1124" b="1" i="0" lang="zh-CN" dirty="0">
+              <a:rPr sz="1624" b="0" i="0" lang="zh-CN" dirty="0">
                 <a:solidFill>
                   <a:srgbClr val="27303A"/>
                 </a:solidFill>
@@ -8370,8 +8370,8 @@
         </p:nvCxnSpPr>
         <p:spPr>
           <a:xfrm>
-            <a:off x="10159999" y="3127374"/>
-            <a:ext cx="0" cy="412750"/>
+            <a:off x="10112374" y="2746374"/>
+            <a:ext cx="0" cy="420688"/>
           </a:xfrm>
           <a:prstGeom prst="line">
             <a:avLst/>
@@ -8406,8 +8406,8 @@
         </p:nvCxnSpPr>
         <p:spPr>
           <a:xfrm flipH="1">
-            <a:off x="2857499" y="3540124"/>
-            <a:ext cx="7302500" cy="0"/>
+            <a:off x="2079624" y="3167062"/>
+            <a:ext cx="8032750" cy="0"/>
           </a:xfrm>
           <a:prstGeom prst="line">
             <a:avLst/>
@@ -8442,8 +8442,8 @@
         </p:nvSpPr>
         <p:spPr>
           <a:xfrm>
-            <a:off x="2809875" y="3540125"/>
-            <a:ext cx="95250" cy="730250"/>
+            <a:off x="2032000" y="3167062"/>
+            <a:ext cx="95250" cy="881062"/>
           </a:xfrm>
           <a:custGeom>
             <a:avLst/>
@@ -8452,24 +8452,24 @@
             <a:cxnLst/>
             <a:rect l="l" t="t" r="r" b="b"/>
             <a:pathLst>
-              <a:path w="12000" h="92000">
+              <a:path w="12000" h="111000">
                 <a:moveTo>
                   <a:pt x="7250" y="0"/>
                 </a:moveTo>
                 <a:lnTo>
-                  <a:pt x="7250" y="77000"/>
+                  <a:pt x="7250" y="96000"/>
                 </a:lnTo>
                 <a:lnTo>
-                  <a:pt x="12000" y="77000"/>
+                  <a:pt x="12000" y="96000"/>
                 </a:lnTo>
                 <a:lnTo>
-                  <a:pt x="6000" y="92000"/>
+                  <a:pt x="6000" y="111000"/>
                 </a:lnTo>
                 <a:lnTo>
-                  <a:pt x="0" y="77000"/>
+                  <a:pt x="0" y="96000"/>
                 </a:lnTo>
                 <a:lnTo>
-                  <a:pt x="4750" y="77000"/>
+                  <a:pt x="4750" y="96000"/>
                 </a:lnTo>
                 <a:lnTo>
                   <a:pt x="4750" y="0"/>
@@ -8516,8 +8516,8 @@
         </p:nvSpPr>
         <p:spPr>
           <a:xfrm>
-            <a:off x="6008687" y="3873499"/>
-            <a:ext cx="1000124" cy="309562"/>
+            <a:off x="5437187" y="2968624"/>
+            <a:ext cx="1317624" cy="404812"/>
           </a:xfrm>
           <a:prstGeom prst="roundRect">
             <a:avLst>
@@ -8564,8 +8564,8 @@
         </p:nvSpPr>
         <p:spPr>
           <a:xfrm>
-            <a:off x="6088062" y="3905249"/>
-            <a:ext cx="841374" cy="246062"/>
+            <a:off x="5516562" y="3000374"/>
+            <a:ext cx="1158874" cy="341312"/>
           </a:xfrm>
           <a:prstGeom prst="rect">
             <a:avLst/>
@@ -8581,7 +8581,7 @@
           <a:p>
             <a:pPr algn="ctr" fontAlgn="base">
               <a:lnSpc>
-                <a:spcPts val="1640"/>
+                <a:spcPts val="2359"/>
               </a:lnSpc>
               <a:spcBef>
                 <a:spcPts val="0"/>
@@ -8589,7 +8589,7 @@
               <a:spcAft>
                 <a:spcPts val="0"/>
               </a:spcAft>
-              <a:defRPr sz="1124" b="1" i="0" lang="zh-CN" dirty="0">
+              <a:defRPr sz="1624" b="0" i="0" lang="zh-CN" dirty="0">
                 <a:solidFill>
                   <a:srgbClr val="27303A"/>
                 </a:solidFill>
@@ -8599,7 +8599,7 @@
               </a:defRPr>
             </a:pPr>
             <a:r>
-              <a:rPr sz="1124" b="1" i="0" lang="zh-CN" dirty="0">
+              <a:rPr sz="1624" b="0" i="0" lang="zh-CN" dirty="0">
                 <a:solidFill>
                   <a:srgbClr val="27303A"/>
                 </a:solidFill>
